--- a/PPT/Review 3.pptx
+++ b/PPT/Review 3.pptx
@@ -2152,6 +2152,10 @@
             <a:noFill/>
           </a:ln>
         </p:spPr>
+        <p:txBody>
+          <a:bodyPr/>
+          <a:p/>
+        </p:txBody>
       </p:sp>
       <p:sp>
         <p:nvSpPr>
@@ -2437,6 +2441,10 @@
             </a:solidFill>
           </a:ln>
         </p:spPr>
+        <p:txBody>
+          <a:bodyPr/>
+          <a:p/>
+        </p:txBody>
       </p:sp>
       <p:sp>
         <p:nvSpPr>
@@ -2596,15 +2604,7 @@
               </a:defRPr>
             </a:pPr>
             <a:r>
-              <a:rPr sz="900" b="0">
-                <a:solidFill>
-                  <a:srgbClr val="F4F0E8"/>
-                </a:solidFill>
-                <a:latin typeface="Aptos"/>
-                <a:ea typeface="Aptos"/>
-                <a:cs typeface="Aptos"/>
-              </a:rPr>
-              <a:t>T Harshith — 2510030029</a:t>
+              <a:t>T Harshith Reddy — 2510030029</a:t>
             </a:r>
           </a:p>
         </p:txBody>
@@ -2813,6 +2813,10 @@
             </a:solidFill>
           </a:ln>
         </p:spPr>
+        <p:txBody>
+          <a:bodyPr/>
+          <a:p/>
+        </p:txBody>
       </p:sp>
       <p:sp>
         <p:nvSpPr>
@@ -2902,6 +2906,10 @@
             </a:solidFill>
           </a:ln>
         </p:spPr>
+        <p:txBody>
+          <a:bodyPr/>
+          <a:p/>
+        </p:txBody>
       </p:sp>
       <p:sp>
         <p:nvSpPr>
@@ -2991,6 +2999,10 @@
             </a:solidFill>
           </a:ln>
         </p:spPr>
+        <p:txBody>
+          <a:bodyPr/>
+          <a:p/>
+        </p:txBody>
       </p:sp>
       <p:sp>
         <p:nvSpPr>
@@ -3080,6 +3092,10 @@
             </a:solidFill>
           </a:ln>
         </p:spPr>
+        <p:txBody>
+          <a:bodyPr/>
+          <a:p/>
+        </p:txBody>
       </p:sp>
       <p:sp>
         <p:nvSpPr>
@@ -3169,6 +3185,10 @@
             </a:solidFill>
           </a:ln>
         </p:spPr>
+        <p:txBody>
+          <a:bodyPr/>
+          <a:p/>
+        </p:txBody>
       </p:sp>
       <p:sp>
         <p:nvSpPr>
@@ -3256,6 +3276,10 @@
             </a:solidFill>
           </a:ln>
         </p:spPr>
+        <p:txBody>
+          <a:bodyPr/>
+          <a:p/>
+        </p:txBody>
       </p:sp>
       <p:sp>
         <p:nvSpPr>
@@ -3288,6 +3312,10 @@
             </a:solidFill>
           </a:ln>
         </p:spPr>
+        <p:txBody>
+          <a:bodyPr/>
+          <a:p/>
+        </p:txBody>
       </p:sp>
       <p:sp>
         <p:nvSpPr>
@@ -3318,6 +3346,10 @@
             </a:solidFill>
           </a:ln>
         </p:spPr>
+        <p:txBody>
+          <a:bodyPr/>
+          <a:p/>
+        </p:txBody>
       </p:sp>
       <p:sp>
         <p:nvSpPr>
@@ -3350,6 +3382,10 @@
             </a:solidFill>
           </a:ln>
         </p:spPr>
+        <p:txBody>
+          <a:bodyPr/>
+          <a:p/>
+        </p:txBody>
       </p:sp>
       <p:sp>
         <p:nvSpPr>
@@ -3380,6 +3416,10 @@
             </a:solidFill>
           </a:ln>
         </p:spPr>
+        <p:txBody>
+          <a:bodyPr/>
+          <a:p/>
+        </p:txBody>
       </p:sp>
       <p:sp>
         <p:nvSpPr>
@@ -3412,6 +3452,10 @@
             </a:solidFill>
           </a:ln>
         </p:spPr>
+        <p:txBody>
+          <a:bodyPr/>
+          <a:p/>
+        </p:txBody>
       </p:sp>
       <p:sp>
         <p:nvSpPr>
@@ -3442,6 +3486,10 @@
             </a:solidFill>
           </a:ln>
         </p:spPr>
+        <p:txBody>
+          <a:bodyPr/>
+          <a:p/>
+        </p:txBody>
       </p:sp>
       <p:sp>
         <p:nvSpPr>
@@ -3474,6 +3522,10 @@
             </a:solidFill>
           </a:ln>
         </p:spPr>
+        <p:txBody>
+          <a:bodyPr/>
+          <a:p/>
+        </p:txBody>
       </p:sp>
       <p:sp>
         <p:nvSpPr>
@@ -3576,15 +3628,7 @@
               </a:defRPr>
             </a:pPr>
             <a:r>
-              <a:rPr sz="825" b="0">
-                <a:solidFill>
-                  <a:srgbClr val="A9ADA7"/>
-                </a:solidFill>
-                <a:latin typeface="Aptos"/>
-                <a:ea typeface="Aptos"/>
-                <a:cs typeface="Aptos"/>
-              </a:rPr>
-              <a:t>Supervisor: ____________________</a:t>
+              <a:t>Supervisor: Dr. M. Saidireddy</a:t>
             </a:r>
           </a:p>
         </p:txBody>
@@ -3656,6 +3700,10 @@
             <a:noFill/>
           </a:ln>
         </p:spPr>
+        <p:txBody>
+          <a:bodyPr/>
+          <a:p/>
+        </p:txBody>
       </p:sp>
       <p:sp>
         <p:nvSpPr>
@@ -3857,6 +3905,10 @@
             </a:solidFill>
           </a:ln>
         </p:spPr>
+        <p:txBody>
+          <a:bodyPr/>
+          <a:p/>
+        </p:txBody>
       </p:sp>
       <p:sp>
         <p:nvSpPr>
@@ -4005,6 +4057,10 @@
             </a:solidFill>
           </a:ln>
         </p:spPr>
+        <p:txBody>
+          <a:bodyPr/>
+          <a:p/>
+        </p:txBody>
       </p:sp>
       <p:sp>
         <p:nvSpPr>
@@ -4263,6 +4319,10 @@
             </a:solidFill>
           </a:ln>
         </p:spPr>
+        <p:txBody>
+          <a:bodyPr/>
+          <a:p/>
+        </p:txBody>
       </p:sp>
       <p:sp>
         <p:nvSpPr>
@@ -4295,6 +4355,10 @@
             </a:solidFill>
           </a:ln>
         </p:spPr>
+        <p:txBody>
+          <a:bodyPr/>
+          <a:p/>
+        </p:txBody>
       </p:sp>
       <p:sp>
         <p:nvSpPr>
@@ -4329,6 +4393,10 @@
             </a:solidFill>
           </a:ln>
         </p:spPr>
+        <p:txBody>
+          <a:bodyPr/>
+          <a:p/>
+        </p:txBody>
       </p:sp>
       <p:sp>
         <p:nvSpPr>
@@ -4587,6 +4655,10 @@
             </a:solidFill>
           </a:ln>
         </p:spPr>
+        <p:txBody>
+          <a:bodyPr/>
+          <a:p/>
+        </p:txBody>
       </p:sp>
       <p:sp>
         <p:nvSpPr>
@@ -4619,6 +4691,10 @@
             </a:solidFill>
           </a:ln>
         </p:spPr>
+        <p:txBody>
+          <a:bodyPr/>
+          <a:p/>
+        </p:txBody>
       </p:sp>
       <p:sp>
         <p:nvSpPr>
@@ -4653,6 +4729,10 @@
             </a:solidFill>
           </a:ln>
         </p:spPr>
+        <p:txBody>
+          <a:bodyPr/>
+          <a:p/>
+        </p:txBody>
       </p:sp>
       <p:sp>
         <p:nvSpPr>
@@ -4949,6 +5029,10 @@
             <a:noFill/>
           </a:ln>
         </p:spPr>
+        <p:txBody>
+          <a:bodyPr/>
+          <a:p/>
+        </p:txBody>
       </p:sp>
       <p:sp>
         <p:nvSpPr>
@@ -5150,6 +5234,10 @@
             </a:solidFill>
           </a:ln>
         </p:spPr>
+        <p:txBody>
+          <a:bodyPr/>
+          <a:p/>
+        </p:txBody>
       </p:sp>
       <p:sp>
         <p:nvSpPr>
@@ -5298,6 +5386,10 @@
             </a:solidFill>
           </a:ln>
         </p:spPr>
+        <p:txBody>
+          <a:bodyPr/>
+          <a:p/>
+        </p:txBody>
       </p:sp>
       <p:sp>
         <p:nvSpPr>
@@ -5446,6 +5538,10 @@
             </a:solidFill>
           </a:ln>
         </p:spPr>
+        <p:txBody>
+          <a:bodyPr/>
+          <a:p/>
+        </p:txBody>
       </p:sp>
       <p:sp>
         <p:nvSpPr>
@@ -5947,15 +6043,7 @@
               </a:defRPr>
             </a:pPr>
             <a:r>
-              <a:rPr sz="750" b="0">
-                <a:solidFill>
-                  <a:srgbClr val="A9ADA7"/>
-                </a:solidFill>
-                <a:latin typeface="Aptos"/>
-                <a:ea typeface="Aptos"/>
-                <a:cs typeface="Aptos"/>
-              </a:rPr>
-              <a:t>D Siddhartha — 2510030423   |   T Harshith — 2510030029   |   S Anirudh — 2510030418   |   Bharath — 2510030114   |   Ganesh — 2510030111</a:t>
+              <a:t>D Siddhartha — 2510030423   |   T Harshith Reddy — 2510030029   |   S Anirudh — 2510030418   |   Bharath — 2510030114   |   Ganesh — 2510030111</a:t>
             </a:r>
           </a:p>
         </p:txBody>
@@ -6027,6 +6115,10 @@
             <a:noFill/>
           </a:ln>
         </p:spPr>
+        <p:txBody>
+          <a:bodyPr/>
+          <a:p/>
+        </p:txBody>
       </p:sp>
       <p:sp>
         <p:nvSpPr>
@@ -6228,6 +6320,10 @@
             </a:solidFill>
           </a:ln>
         </p:spPr>
+        <p:txBody>
+          <a:bodyPr/>
+          <a:p/>
+        </p:txBody>
       </p:sp>
       <p:sp>
         <p:nvSpPr>
@@ -6376,6 +6472,10 @@
             </a:solidFill>
           </a:ln>
         </p:spPr>
+        <p:txBody>
+          <a:bodyPr/>
+          <a:p/>
+        </p:txBody>
       </p:sp>
       <p:sp>
         <p:nvSpPr>
@@ -6465,6 +6565,10 @@
             </a:solidFill>
           </a:ln>
         </p:spPr>
+        <p:txBody>
+          <a:bodyPr/>
+          <a:p/>
+        </p:txBody>
       </p:sp>
       <p:sp>
         <p:nvSpPr>
@@ -6552,6 +6656,10 @@
             </a:solidFill>
           </a:ln>
         </p:spPr>
+        <p:txBody>
+          <a:bodyPr/>
+          <a:p/>
+        </p:txBody>
       </p:sp>
       <p:sp>
         <p:nvSpPr>
@@ -6584,6 +6692,10 @@
             </a:solidFill>
           </a:ln>
         </p:spPr>
+        <p:txBody>
+          <a:bodyPr/>
+          <a:p/>
+        </p:txBody>
       </p:sp>
       <p:sp>
         <p:nvSpPr>
@@ -6616,6 +6728,10 @@
             </a:solidFill>
           </a:ln>
         </p:spPr>
+        <p:txBody>
+          <a:bodyPr/>
+          <a:p/>
+        </p:txBody>
       </p:sp>
       <p:sp>
         <p:nvSpPr>
@@ -6703,6 +6819,10 @@
             </a:solidFill>
           </a:ln>
         </p:spPr>
+        <p:txBody>
+          <a:bodyPr/>
+          <a:p/>
+        </p:txBody>
       </p:sp>
       <p:sp>
         <p:nvSpPr>
@@ -6735,6 +6855,10 @@
             </a:solidFill>
           </a:ln>
         </p:spPr>
+        <p:txBody>
+          <a:bodyPr/>
+          <a:p/>
+        </p:txBody>
       </p:sp>
       <p:sp>
         <p:nvSpPr>
@@ -6767,6 +6891,10 @@
             </a:solidFill>
           </a:ln>
         </p:spPr>
+        <p:txBody>
+          <a:bodyPr/>
+          <a:p/>
+        </p:txBody>
       </p:sp>
       <p:sp>
         <p:nvSpPr>
@@ -6854,6 +6982,10 @@
             </a:solidFill>
           </a:ln>
         </p:spPr>
+        <p:txBody>
+          <a:bodyPr/>
+          <a:p/>
+        </p:txBody>
       </p:sp>
       <p:sp>
         <p:nvSpPr>
@@ -6886,6 +7018,10 @@
             </a:solidFill>
           </a:ln>
         </p:spPr>
+        <p:txBody>
+          <a:bodyPr/>
+          <a:p/>
+        </p:txBody>
       </p:sp>
       <p:sp>
         <p:nvSpPr>
@@ -6920,6 +7056,10 @@
             </a:solidFill>
           </a:ln>
         </p:spPr>
+        <p:txBody>
+          <a:bodyPr/>
+          <a:p/>
+        </p:txBody>
       </p:sp>
       <p:sp>
         <p:nvSpPr>
@@ -7009,6 +7149,10 @@
             </a:solidFill>
           </a:ln>
         </p:spPr>
+        <p:txBody>
+          <a:bodyPr/>
+          <a:p/>
+        </p:txBody>
       </p:sp>
       <p:sp>
         <p:nvSpPr>
@@ -7096,6 +7240,10 @@
             </a:solidFill>
           </a:ln>
         </p:spPr>
+        <p:txBody>
+          <a:bodyPr/>
+          <a:p/>
+        </p:txBody>
       </p:sp>
       <p:sp>
         <p:nvSpPr>
@@ -7128,6 +7276,10 @@
             </a:solidFill>
           </a:ln>
         </p:spPr>
+        <p:txBody>
+          <a:bodyPr/>
+          <a:p/>
+        </p:txBody>
       </p:sp>
       <p:sp>
         <p:nvSpPr>
@@ -7160,6 +7312,10 @@
             </a:solidFill>
           </a:ln>
         </p:spPr>
+        <p:txBody>
+          <a:bodyPr/>
+          <a:p/>
+        </p:txBody>
       </p:sp>
       <p:sp>
         <p:nvSpPr>
@@ -7247,6 +7403,10 @@
             </a:solidFill>
           </a:ln>
         </p:spPr>
+        <p:txBody>
+          <a:bodyPr/>
+          <a:p/>
+        </p:txBody>
       </p:sp>
       <p:sp>
         <p:nvSpPr>
@@ -7279,6 +7439,10 @@
             </a:solidFill>
           </a:ln>
         </p:spPr>
+        <p:txBody>
+          <a:bodyPr/>
+          <a:p/>
+        </p:txBody>
       </p:sp>
       <p:sp>
         <p:nvSpPr>
@@ -7311,6 +7475,10 @@
             </a:solidFill>
           </a:ln>
         </p:spPr>
+        <p:txBody>
+          <a:bodyPr/>
+          <a:p/>
+        </p:txBody>
       </p:sp>
       <p:sp>
         <p:nvSpPr>
@@ -7398,6 +7566,10 @@
             </a:solidFill>
           </a:ln>
         </p:spPr>
+        <p:txBody>
+          <a:bodyPr/>
+          <a:p/>
+        </p:txBody>
       </p:sp>
       <p:sp>
         <p:nvSpPr>
@@ -7430,6 +7602,10 @@
             </a:solidFill>
           </a:ln>
         </p:spPr>
+        <p:txBody>
+          <a:bodyPr/>
+          <a:p/>
+        </p:txBody>
       </p:sp>
       <p:sp>
         <p:nvSpPr>
@@ -7462,6 +7638,10 @@
             </a:solidFill>
           </a:ln>
         </p:spPr>
+        <p:txBody>
+          <a:bodyPr/>
+          <a:p/>
+        </p:txBody>
       </p:sp>
       <p:sp>
         <p:nvSpPr>
@@ -7549,6 +7729,10 @@
             </a:solidFill>
           </a:ln>
         </p:spPr>
+        <p:txBody>
+          <a:bodyPr/>
+          <a:p/>
+        </p:txBody>
       </p:sp>
       <p:sp>
         <p:nvSpPr>
@@ -7581,6 +7765,10 @@
             </a:solidFill>
           </a:ln>
         </p:spPr>
+        <p:txBody>
+          <a:bodyPr/>
+          <a:p/>
+        </p:txBody>
       </p:sp>
       <p:sp>
         <p:nvSpPr>
@@ -7763,6 +7951,10 @@
             <a:noFill/>
           </a:ln>
         </p:spPr>
+        <p:txBody>
+          <a:bodyPr/>
+          <a:p/>
+        </p:txBody>
       </p:sp>
       <p:sp>
         <p:nvSpPr>
@@ -7964,6 +8156,10 @@
             </a:solidFill>
           </a:ln>
         </p:spPr>
+        <p:txBody>
+          <a:bodyPr/>
+          <a:p/>
+        </p:txBody>
       </p:sp>
       <p:sp>
         <p:nvSpPr>
@@ -8112,6 +8308,10 @@
             </a:solidFill>
           </a:ln>
         </p:spPr>
+        <p:txBody>
+          <a:bodyPr/>
+          <a:p/>
+        </p:txBody>
       </p:sp>
       <p:sp>
         <p:nvSpPr>
@@ -8222,6 +8422,10 @@
             </a:solidFill>
           </a:ln>
         </p:spPr>
+        <p:txBody>
+          <a:bodyPr/>
+          <a:p/>
+        </p:txBody>
       </p:sp>
       <p:sp>
         <p:nvSpPr>
@@ -8254,6 +8458,10 @@
             </a:solidFill>
           </a:ln>
         </p:spPr>
+        <p:txBody>
+          <a:bodyPr/>
+          <a:p/>
+        </p:txBody>
       </p:sp>
       <p:sp>
         <p:nvSpPr>
@@ -8288,6 +8496,10 @@
             </a:solidFill>
           </a:ln>
         </p:spPr>
+        <p:txBody>
+          <a:bodyPr/>
+          <a:p/>
+        </p:txBody>
       </p:sp>
       <p:sp>
         <p:nvSpPr>
@@ -8398,6 +8610,10 @@
             </a:solidFill>
           </a:ln>
         </p:spPr>
+        <p:txBody>
+          <a:bodyPr/>
+          <a:p/>
+        </p:txBody>
       </p:sp>
       <p:sp>
         <p:nvSpPr>
@@ -8430,6 +8646,10 @@
             </a:solidFill>
           </a:ln>
         </p:spPr>
+        <p:txBody>
+          <a:bodyPr/>
+          <a:p/>
+        </p:txBody>
       </p:sp>
       <p:sp>
         <p:nvSpPr>
@@ -8464,6 +8684,10 @@
             </a:solidFill>
           </a:ln>
         </p:spPr>
+        <p:txBody>
+          <a:bodyPr/>
+          <a:p/>
+        </p:txBody>
       </p:sp>
       <p:sp>
         <p:nvSpPr>
@@ -8574,6 +8798,10 @@
             </a:solidFill>
           </a:ln>
         </p:spPr>
+        <p:txBody>
+          <a:bodyPr/>
+          <a:p/>
+        </p:txBody>
       </p:sp>
       <p:sp>
         <p:nvSpPr>
@@ -8606,6 +8834,10 @@
             </a:solidFill>
           </a:ln>
         </p:spPr>
+        <p:txBody>
+          <a:bodyPr/>
+          <a:p/>
+        </p:txBody>
       </p:sp>
       <p:sp>
         <p:nvSpPr>
@@ -8640,6 +8872,10 @@
             </a:solidFill>
           </a:ln>
         </p:spPr>
+        <p:txBody>
+          <a:bodyPr/>
+          <a:p/>
+        </p:txBody>
       </p:sp>
       <p:sp>
         <p:nvSpPr>
@@ -8754,6 +8990,10 @@
             </a:solidFill>
           </a:ln>
         </p:spPr>
+        <p:txBody>
+          <a:bodyPr/>
+          <a:p/>
+        </p:txBody>
       </p:sp>
       <p:sp>
         <p:nvSpPr>
@@ -8902,6 +9142,10 @@
             </a:solidFill>
           </a:ln>
         </p:spPr>
+        <p:txBody>
+          <a:bodyPr/>
+          <a:p/>
+        </p:txBody>
       </p:sp>
       <p:sp>
         <p:nvSpPr>
@@ -8993,6 +9237,10 @@
             </a:solidFill>
           </a:ln>
         </p:spPr>
+        <p:txBody>
+          <a:bodyPr/>
+          <a:p/>
+        </p:txBody>
       </p:sp>
       <p:sp>
         <p:nvSpPr>
@@ -9084,6 +9332,10 @@
             </a:solidFill>
           </a:ln>
         </p:spPr>
+        <p:txBody>
+          <a:bodyPr/>
+          <a:p/>
+        </p:txBody>
       </p:sp>
       <p:sp>
         <p:nvSpPr>
@@ -9175,6 +9427,10 @@
             </a:solidFill>
           </a:ln>
         </p:spPr>
+        <p:txBody>
+          <a:bodyPr/>
+          <a:p/>
+        </p:txBody>
       </p:sp>
       <p:sp>
         <p:nvSpPr>
@@ -9266,6 +9522,10 @@
             </a:solidFill>
           </a:ln>
         </p:spPr>
+        <p:txBody>
+          <a:bodyPr/>
+          <a:p/>
+        </p:txBody>
       </p:sp>
       <p:sp>
         <p:nvSpPr>
@@ -9391,6 +9651,10 @@
             <a:noFill/>
           </a:ln>
         </p:spPr>
+        <p:txBody>
+          <a:bodyPr/>
+          <a:p/>
+        </p:txBody>
       </p:sp>
       <p:sp>
         <p:nvSpPr>
@@ -9592,6 +9856,10 @@
             </a:solidFill>
           </a:ln>
         </p:spPr>
+        <p:txBody>
+          <a:bodyPr/>
+          <a:p/>
+        </p:txBody>
       </p:sp>
       <p:sp>
         <p:nvSpPr>
@@ -9740,6 +10008,10 @@
             </a:solidFill>
           </a:ln>
         </p:spPr>
+        <p:txBody>
+          <a:bodyPr/>
+          <a:p/>
+        </p:txBody>
       </p:sp>
       <p:sp>
         <p:nvSpPr>
@@ -9884,6 +10156,10 @@
             </a:solidFill>
           </a:ln>
         </p:spPr>
+        <p:txBody>
+          <a:bodyPr/>
+          <a:p/>
+        </p:txBody>
       </p:sp>
       <p:sp>
         <p:nvSpPr>
@@ -9916,6 +10192,10 @@
             </a:solidFill>
           </a:ln>
         </p:spPr>
+        <p:txBody>
+          <a:bodyPr/>
+          <a:p/>
+        </p:txBody>
       </p:sp>
       <p:sp>
         <p:nvSpPr>
@@ -9950,6 +10230,10 @@
             </a:solidFill>
           </a:ln>
         </p:spPr>
+        <p:txBody>
+          <a:bodyPr/>
+          <a:p/>
+        </p:txBody>
       </p:sp>
       <p:sp>
         <p:nvSpPr>
@@ -10094,6 +10378,10 @@
             </a:solidFill>
           </a:ln>
         </p:spPr>
+        <p:txBody>
+          <a:bodyPr/>
+          <a:p/>
+        </p:txBody>
       </p:sp>
       <p:sp>
         <p:nvSpPr>
@@ -10126,6 +10414,10 @@
             </a:solidFill>
           </a:ln>
         </p:spPr>
+        <p:txBody>
+          <a:bodyPr/>
+          <a:p/>
+        </p:txBody>
       </p:sp>
       <p:sp>
         <p:nvSpPr>
@@ -10160,6 +10452,10 @@
             </a:solidFill>
           </a:ln>
         </p:spPr>
+        <p:txBody>
+          <a:bodyPr/>
+          <a:p/>
+        </p:txBody>
       </p:sp>
       <p:sp>
         <p:nvSpPr>
@@ -10304,6 +10600,10 @@
             </a:solidFill>
           </a:ln>
         </p:spPr>
+        <p:txBody>
+          <a:bodyPr/>
+          <a:p/>
+        </p:txBody>
       </p:sp>
       <p:sp>
         <p:nvSpPr>
@@ -10336,6 +10636,10 @@
             </a:solidFill>
           </a:ln>
         </p:spPr>
+        <p:txBody>
+          <a:bodyPr/>
+          <a:p/>
+        </p:txBody>
       </p:sp>
       <p:sp>
         <p:nvSpPr>
@@ -10370,6 +10674,10 @@
             </a:solidFill>
           </a:ln>
         </p:spPr>
+        <p:txBody>
+          <a:bodyPr/>
+          <a:p/>
+        </p:txBody>
       </p:sp>
       <p:sp>
         <p:nvSpPr>
@@ -10514,6 +10822,10 @@
             </a:solidFill>
           </a:ln>
         </p:spPr>
+        <p:txBody>
+          <a:bodyPr/>
+          <a:p/>
+        </p:txBody>
       </p:sp>
       <p:sp>
         <p:nvSpPr>
@@ -10546,6 +10858,10 @@
             </a:solidFill>
           </a:ln>
         </p:spPr>
+        <p:txBody>
+          <a:bodyPr/>
+          <a:p/>
+        </p:txBody>
       </p:sp>
       <p:sp>
         <p:nvSpPr>
@@ -10580,6 +10896,10 @@
             </a:solidFill>
           </a:ln>
         </p:spPr>
+        <p:txBody>
+          <a:bodyPr/>
+          <a:p/>
+        </p:txBody>
       </p:sp>
       <p:sp>
         <p:nvSpPr>
@@ -10724,6 +11044,10 @@
             </a:solidFill>
           </a:ln>
         </p:spPr>
+        <p:txBody>
+          <a:bodyPr/>
+          <a:p/>
+        </p:txBody>
       </p:sp>
       <p:sp>
         <p:nvSpPr>
@@ -10756,6 +11080,10 @@
             </a:solidFill>
           </a:ln>
         </p:spPr>
+        <p:txBody>
+          <a:bodyPr/>
+          <a:p/>
+        </p:txBody>
       </p:sp>
       <p:sp>
         <p:nvSpPr>
@@ -10790,6 +11118,10 @@
             </a:solidFill>
           </a:ln>
         </p:spPr>
+        <p:txBody>
+          <a:bodyPr/>
+          <a:p/>
+        </p:txBody>
       </p:sp>
       <p:sp>
         <p:nvSpPr>
@@ -10934,6 +11266,10 @@
             </a:solidFill>
           </a:ln>
         </p:spPr>
+        <p:txBody>
+          <a:bodyPr/>
+          <a:p/>
+        </p:txBody>
       </p:sp>
       <p:sp>
         <p:nvSpPr>
@@ -10966,6 +11302,10 @@
             </a:solidFill>
           </a:ln>
         </p:spPr>
+        <p:txBody>
+          <a:bodyPr/>
+          <a:p/>
+        </p:txBody>
       </p:sp>
       <p:sp>
         <p:nvSpPr>
@@ -11000,6 +11340,10 @@
             </a:solidFill>
           </a:ln>
         </p:spPr>
+        <p:txBody>
+          <a:bodyPr/>
+          <a:p/>
+        </p:txBody>
       </p:sp>
       <p:sp>
         <p:nvSpPr>
@@ -11144,6 +11488,10 @@
             </a:solidFill>
           </a:ln>
         </p:spPr>
+        <p:txBody>
+          <a:bodyPr/>
+          <a:p/>
+        </p:txBody>
       </p:sp>
       <p:sp>
         <p:nvSpPr>
@@ -11176,6 +11524,10 @@
             </a:solidFill>
           </a:ln>
         </p:spPr>
+        <p:txBody>
+          <a:bodyPr/>
+          <a:p/>
+        </p:txBody>
       </p:sp>
       <p:sp>
         <p:nvSpPr>
@@ -11210,6 +11562,10 @@
             </a:solidFill>
           </a:ln>
         </p:spPr>
+        <p:txBody>
+          <a:bodyPr/>
+          <a:p/>
+        </p:txBody>
       </p:sp>
       <p:sp>
         <p:nvSpPr>
@@ -11354,6 +11710,10 @@
             </a:solidFill>
           </a:ln>
         </p:spPr>
+        <p:txBody>
+          <a:bodyPr/>
+          <a:p/>
+        </p:txBody>
       </p:sp>
       <p:sp>
         <p:nvSpPr>
@@ -11386,6 +11746,10 @@
             </a:solidFill>
           </a:ln>
         </p:spPr>
+        <p:txBody>
+          <a:bodyPr/>
+          <a:p/>
+        </p:txBody>
       </p:sp>
       <p:sp>
         <p:nvSpPr>
@@ -11420,6 +11784,10 @@
             </a:solidFill>
           </a:ln>
         </p:spPr>
+        <p:txBody>
+          <a:bodyPr/>
+          <a:p/>
+        </p:txBody>
       </p:sp>
       <p:sp>
         <p:nvSpPr>
@@ -11602,6 +11970,10 @@
             <a:noFill/>
           </a:ln>
         </p:spPr>
+        <p:txBody>
+          <a:bodyPr/>
+          <a:p/>
+        </p:txBody>
       </p:sp>
       <p:sp>
         <p:nvSpPr>
@@ -11803,6 +12175,10 @@
             </a:solidFill>
           </a:ln>
         </p:spPr>
+        <p:txBody>
+          <a:bodyPr/>
+          <a:p/>
+        </p:txBody>
       </p:sp>
       <p:sp>
         <p:nvSpPr>
@@ -11951,6 +12327,10 @@
             </a:solidFill>
           </a:ln>
         </p:spPr>
+        <p:txBody>
+          <a:bodyPr/>
+          <a:p/>
+        </p:txBody>
       </p:sp>
       <p:sp>
         <p:nvSpPr>
@@ -12042,6 +12422,10 @@
             </a:solidFill>
           </a:ln>
         </p:spPr>
+        <p:txBody>
+          <a:bodyPr/>
+          <a:p/>
+        </p:txBody>
       </p:sp>
       <p:sp>
         <p:nvSpPr>
@@ -12133,6 +12517,10 @@
             </a:solidFill>
           </a:ln>
         </p:spPr>
+        <p:txBody>
+          <a:bodyPr/>
+          <a:p/>
+        </p:txBody>
       </p:sp>
       <p:sp>
         <p:nvSpPr>
@@ -12224,6 +12612,10 @@
             </a:solidFill>
           </a:ln>
         </p:spPr>
+        <p:txBody>
+          <a:bodyPr/>
+          <a:p/>
+        </p:txBody>
       </p:sp>
       <p:sp>
         <p:nvSpPr>
@@ -12315,6 +12707,10 @@
             </a:solidFill>
           </a:ln>
         </p:spPr>
+        <p:txBody>
+          <a:bodyPr/>
+          <a:p/>
+        </p:txBody>
       </p:sp>
       <p:sp>
         <p:nvSpPr>
@@ -12406,6 +12802,10 @@
             </a:solidFill>
           </a:ln>
         </p:spPr>
+        <p:txBody>
+          <a:bodyPr/>
+          <a:p/>
+        </p:txBody>
       </p:sp>
       <p:sp>
         <p:nvSpPr>
@@ -12497,6 +12897,10 @@
             </a:solidFill>
           </a:ln>
         </p:spPr>
+        <p:txBody>
+          <a:bodyPr/>
+          <a:p/>
+        </p:txBody>
       </p:sp>
       <p:sp>
         <p:nvSpPr>
@@ -12588,6 +12992,10 @@
             </a:solidFill>
           </a:ln>
         </p:spPr>
+        <p:txBody>
+          <a:bodyPr/>
+          <a:p/>
+        </p:txBody>
       </p:sp>
       <p:sp>
         <p:nvSpPr>
@@ -12679,6 +13087,10 @@
             </a:solidFill>
           </a:ln>
         </p:spPr>
+        <p:txBody>
+          <a:bodyPr/>
+          <a:p/>
+        </p:txBody>
       </p:sp>
       <p:sp>
         <p:nvSpPr>
@@ -12770,6 +13182,10 @@
             </a:solidFill>
           </a:ln>
         </p:spPr>
+        <p:txBody>
+          <a:bodyPr/>
+          <a:p/>
+        </p:txBody>
       </p:sp>
       <p:sp>
         <p:nvSpPr>
@@ -12861,6 +13277,10 @@
             </a:solidFill>
           </a:ln>
         </p:spPr>
+        <p:txBody>
+          <a:bodyPr/>
+          <a:p/>
+        </p:txBody>
       </p:sp>
       <p:sp>
         <p:nvSpPr>
@@ -12952,6 +13372,10 @@
             </a:solidFill>
           </a:ln>
         </p:spPr>
+        <p:txBody>
+          <a:bodyPr/>
+          <a:p/>
+        </p:txBody>
       </p:sp>
       <p:sp>
         <p:nvSpPr>
@@ -13134,6 +13558,10 @@
             <a:noFill/>
           </a:ln>
         </p:spPr>
+        <p:txBody>
+          <a:bodyPr/>
+          <a:p/>
+        </p:txBody>
       </p:sp>
       <p:sp>
         <p:nvSpPr>
@@ -13335,6 +13763,10 @@
             </a:solidFill>
           </a:ln>
         </p:spPr>
+        <p:txBody>
+          <a:bodyPr/>
+          <a:p/>
+        </p:txBody>
       </p:sp>
       <p:sp>
         <p:nvSpPr>
@@ -13479,6 +13911,10 @@
             <a:noFill/>
           </a:ln>
         </p:spPr>
+        <p:txBody>
+          <a:bodyPr/>
+          <a:p/>
+        </p:txBody>
       </p:sp>
       <p:sp>
         <p:nvSpPr>
@@ -13680,6 +14116,10 @@
             <a:noFill/>
           </a:ln>
         </p:spPr>
+        <p:txBody>
+          <a:bodyPr/>
+          <a:p/>
+        </p:txBody>
       </p:sp>
       <p:sp>
         <p:nvSpPr>
@@ -13881,6 +14321,10 @@
             <a:noFill/>
           </a:ln>
         </p:spPr>
+        <p:txBody>
+          <a:bodyPr/>
+          <a:p/>
+        </p:txBody>
       </p:sp>
       <p:sp>
         <p:nvSpPr>
@@ -14082,6 +14526,10 @@
             <a:noFill/>
           </a:ln>
         </p:spPr>
+        <p:txBody>
+          <a:bodyPr/>
+          <a:p/>
+        </p:txBody>
       </p:sp>
       <p:sp>
         <p:nvSpPr>
@@ -14283,6 +14731,10 @@
             <a:noFill/>
           </a:ln>
         </p:spPr>
+        <p:txBody>
+          <a:bodyPr/>
+          <a:p/>
+        </p:txBody>
       </p:sp>
       <p:sp>
         <p:nvSpPr>
@@ -14484,6 +14936,10 @@
             <a:noFill/>
           </a:ln>
         </p:spPr>
+        <p:txBody>
+          <a:bodyPr/>
+          <a:p/>
+        </p:txBody>
       </p:sp>
       <p:sp>
         <p:nvSpPr>
@@ -14685,6 +15141,10 @@
             <a:noFill/>
           </a:ln>
         </p:spPr>
+        <p:txBody>
+          <a:bodyPr/>
+          <a:p/>
+        </p:txBody>
       </p:sp>
       <p:sp>
         <p:nvSpPr>
@@ -14886,6 +15346,10 @@
             <a:noFill/>
           </a:ln>
         </p:spPr>
+        <p:txBody>
+          <a:bodyPr/>
+          <a:p/>
+        </p:txBody>
       </p:sp>
       <p:sp>
         <p:nvSpPr>
@@ -15087,6 +15551,10 @@
             <a:noFill/>
           </a:ln>
         </p:spPr>
+        <p:txBody>
+          <a:bodyPr/>
+          <a:p/>
+        </p:txBody>
       </p:sp>
       <p:sp>
         <p:nvSpPr>
@@ -15326,6 +15794,10 @@
             <a:noFill/>
           </a:ln>
         </p:spPr>
+        <p:txBody>
+          <a:bodyPr/>
+          <a:p/>
+        </p:txBody>
       </p:sp>
       <p:sp>
         <p:nvSpPr>
@@ -15527,6 +15999,10 @@
             </a:solidFill>
           </a:ln>
         </p:spPr>
+        <p:txBody>
+          <a:bodyPr/>
+          <a:p/>
+        </p:txBody>
       </p:sp>
       <p:sp>
         <p:nvSpPr>
@@ -15675,6 +16151,10 @@
             </a:solidFill>
           </a:ln>
         </p:spPr>
+        <p:txBody>
+          <a:bodyPr/>
+          <a:p/>
+        </p:txBody>
       </p:sp>
       <p:sp>
         <p:nvSpPr>
@@ -15819,6 +16299,10 @@
             </a:solidFill>
           </a:ln>
         </p:spPr>
+        <p:txBody>
+          <a:bodyPr/>
+          <a:p/>
+        </p:txBody>
       </p:sp>
       <p:sp>
         <p:nvSpPr>
@@ -15851,6 +16335,10 @@
             </a:solidFill>
           </a:ln>
         </p:spPr>
+        <p:txBody>
+          <a:bodyPr/>
+          <a:p/>
+        </p:txBody>
       </p:sp>
       <p:sp>
         <p:nvSpPr>
@@ -15885,6 +16373,10 @@
             </a:solidFill>
           </a:ln>
         </p:spPr>
+        <p:txBody>
+          <a:bodyPr/>
+          <a:p/>
+        </p:txBody>
       </p:sp>
       <p:sp>
         <p:nvSpPr>
@@ -16029,6 +16521,10 @@
             </a:solidFill>
           </a:ln>
         </p:spPr>
+        <p:txBody>
+          <a:bodyPr/>
+          <a:p/>
+        </p:txBody>
       </p:sp>
       <p:sp>
         <p:nvSpPr>
@@ -16061,6 +16557,10 @@
             </a:solidFill>
           </a:ln>
         </p:spPr>
+        <p:txBody>
+          <a:bodyPr/>
+          <a:p/>
+        </p:txBody>
       </p:sp>
       <p:sp>
         <p:nvSpPr>
@@ -16095,6 +16595,10 @@
             </a:solidFill>
           </a:ln>
         </p:spPr>
+        <p:txBody>
+          <a:bodyPr/>
+          <a:p/>
+        </p:txBody>
       </p:sp>
       <p:sp>
         <p:nvSpPr>
@@ -16239,6 +16743,10 @@
             </a:solidFill>
           </a:ln>
         </p:spPr>
+        <p:txBody>
+          <a:bodyPr/>
+          <a:p/>
+        </p:txBody>
       </p:sp>
       <p:sp>
         <p:nvSpPr>
@@ -16271,6 +16779,10 @@
             </a:solidFill>
           </a:ln>
         </p:spPr>
+        <p:txBody>
+          <a:bodyPr/>
+          <a:p/>
+        </p:txBody>
       </p:sp>
       <p:sp>
         <p:nvSpPr>
@@ -16305,6 +16817,10 @@
             </a:solidFill>
           </a:ln>
         </p:spPr>
+        <p:txBody>
+          <a:bodyPr/>
+          <a:p/>
+        </p:txBody>
       </p:sp>
       <p:sp>
         <p:nvSpPr>
@@ -16449,6 +16965,10 @@
             </a:solidFill>
           </a:ln>
         </p:spPr>
+        <p:txBody>
+          <a:bodyPr/>
+          <a:p/>
+        </p:txBody>
       </p:sp>
       <p:sp>
         <p:nvSpPr>
@@ -16481,6 +17001,10 @@
             </a:solidFill>
           </a:ln>
         </p:spPr>
+        <p:txBody>
+          <a:bodyPr/>
+          <a:p/>
+        </p:txBody>
       </p:sp>
       <p:sp>
         <p:nvSpPr>
@@ -16515,6 +17039,10 @@
             </a:solidFill>
           </a:ln>
         </p:spPr>
+        <p:txBody>
+          <a:bodyPr/>
+          <a:p/>
+        </p:txBody>
       </p:sp>
       <p:sp>
         <p:nvSpPr>
@@ -16659,6 +17187,10 @@
             </a:solidFill>
           </a:ln>
         </p:spPr>
+        <p:txBody>
+          <a:bodyPr/>
+          <a:p/>
+        </p:txBody>
       </p:sp>
       <p:sp>
         <p:nvSpPr>
@@ -16691,6 +17223,10 @@
             </a:solidFill>
           </a:ln>
         </p:spPr>
+        <p:txBody>
+          <a:bodyPr/>
+          <a:p/>
+        </p:txBody>
       </p:sp>
       <p:sp>
         <p:nvSpPr>
@@ -16725,6 +17261,10 @@
             </a:solidFill>
           </a:ln>
         </p:spPr>
+        <p:txBody>
+          <a:bodyPr/>
+          <a:p/>
+        </p:txBody>
       </p:sp>
       <p:sp>
         <p:nvSpPr>
@@ -16869,6 +17409,10 @@
             </a:solidFill>
           </a:ln>
         </p:spPr>
+        <p:txBody>
+          <a:bodyPr/>
+          <a:p/>
+        </p:txBody>
       </p:sp>
       <p:sp>
         <p:nvSpPr>
@@ -16901,6 +17445,10 @@
             </a:solidFill>
           </a:ln>
         </p:spPr>
+        <p:txBody>
+          <a:bodyPr/>
+          <a:p/>
+        </p:txBody>
       </p:sp>
       <p:sp>
         <p:nvSpPr>
@@ -16935,6 +17483,10 @@
             </a:solidFill>
           </a:ln>
         </p:spPr>
+        <p:txBody>
+          <a:bodyPr/>
+          <a:p/>
+        </p:txBody>
       </p:sp>
       <p:sp>
         <p:nvSpPr>
@@ -17079,6 +17631,10 @@
             </a:solidFill>
           </a:ln>
         </p:spPr>
+        <p:txBody>
+          <a:bodyPr/>
+          <a:p/>
+        </p:txBody>
       </p:sp>
       <p:sp>
         <p:nvSpPr>
@@ -17111,6 +17667,10 @@
             </a:solidFill>
           </a:ln>
         </p:spPr>
+        <p:txBody>
+          <a:bodyPr/>
+          <a:p/>
+        </p:txBody>
       </p:sp>
       <p:sp>
         <p:nvSpPr>
@@ -17145,6 +17705,10 @@
             </a:solidFill>
           </a:ln>
         </p:spPr>
+        <p:txBody>
+          <a:bodyPr/>
+          <a:p/>
+        </p:txBody>
       </p:sp>
       <p:sp>
         <p:nvSpPr>
@@ -17289,6 +17853,10 @@
             </a:solidFill>
           </a:ln>
         </p:spPr>
+        <p:txBody>
+          <a:bodyPr/>
+          <a:p/>
+        </p:txBody>
       </p:sp>
       <p:sp>
         <p:nvSpPr>
@@ -17321,6 +17889,10 @@
             </a:solidFill>
           </a:ln>
         </p:spPr>
+        <p:txBody>
+          <a:bodyPr/>
+          <a:p/>
+        </p:txBody>
       </p:sp>
       <p:sp>
         <p:nvSpPr>
@@ -17355,6 +17927,10 @@
             </a:solidFill>
           </a:ln>
         </p:spPr>
+        <p:txBody>
+          <a:bodyPr/>
+          <a:p/>
+        </p:txBody>
       </p:sp>
       <p:sp>
         <p:nvSpPr>
@@ -17499,6 +18075,10 @@
             </a:solidFill>
           </a:ln>
         </p:spPr>
+        <p:txBody>
+          <a:bodyPr/>
+          <a:p/>
+        </p:txBody>
       </p:sp>
       <p:sp>
         <p:nvSpPr>
@@ -17531,6 +18111,10 @@
             </a:solidFill>
           </a:ln>
         </p:spPr>
+        <p:txBody>
+          <a:bodyPr/>
+          <a:p/>
+        </p:txBody>
       </p:sp>
       <p:sp>
         <p:nvSpPr>
@@ -17565,6 +18149,10 @@
             </a:solidFill>
           </a:ln>
         </p:spPr>
+        <p:txBody>
+          <a:bodyPr/>
+          <a:p/>
+        </p:txBody>
       </p:sp>
       <p:sp>
         <p:nvSpPr>
@@ -17709,6 +18297,10 @@
             </a:solidFill>
           </a:ln>
         </p:spPr>
+        <p:txBody>
+          <a:bodyPr/>
+          <a:p/>
+        </p:txBody>
       </p:sp>
       <p:sp>
         <p:nvSpPr>
@@ -17741,6 +18333,10 @@
             </a:solidFill>
           </a:ln>
         </p:spPr>
+        <p:txBody>
+          <a:bodyPr/>
+          <a:p/>
+        </p:txBody>
       </p:sp>
       <p:sp>
         <p:nvSpPr>
@@ -17775,6 +18371,10 @@
             </a:solidFill>
           </a:ln>
         </p:spPr>
+        <p:txBody>
+          <a:bodyPr/>
+          <a:p/>
+        </p:txBody>
       </p:sp>
       <p:sp>
         <p:nvSpPr>
@@ -17923,6 +18523,10 @@
             </a:solidFill>
           </a:ln>
         </p:spPr>
+        <p:txBody>
+          <a:bodyPr/>
+          <a:p/>
+        </p:txBody>
       </p:sp>
       <p:sp>
         <p:nvSpPr>
@@ -18105,6 +18709,10 @@
             <a:noFill/>
           </a:ln>
         </p:spPr>
+        <p:txBody>
+          <a:bodyPr/>
+          <a:p/>
+        </p:txBody>
       </p:sp>
       <p:sp>
         <p:nvSpPr>
@@ -18306,6 +18914,10 @@
             </a:solidFill>
           </a:ln>
         </p:spPr>
+        <p:txBody>
+          <a:bodyPr/>
+          <a:p/>
+        </p:txBody>
       </p:sp>
       <p:sp>
         <p:nvSpPr>
@@ -18454,6 +19066,10 @@
             </a:solidFill>
           </a:ln>
         </p:spPr>
+        <p:txBody>
+          <a:bodyPr/>
+          <a:p/>
+        </p:txBody>
       </p:sp>
       <p:sp>
         <p:nvSpPr>
@@ -18541,6 +19157,10 @@
             </a:solidFill>
           </a:ln>
         </p:spPr>
+        <p:txBody>
+          <a:bodyPr/>
+          <a:p/>
+        </p:txBody>
       </p:sp>
       <p:sp>
         <p:nvSpPr>
@@ -18573,6 +19193,10 @@
             </a:solidFill>
           </a:ln>
         </p:spPr>
+        <p:txBody>
+          <a:bodyPr/>
+          <a:p/>
+        </p:txBody>
       </p:sp>
       <p:sp>
         <p:nvSpPr>
@@ -18607,6 +19231,10 @@
             </a:solidFill>
           </a:ln>
         </p:spPr>
+        <p:txBody>
+          <a:bodyPr/>
+          <a:p/>
+        </p:txBody>
       </p:sp>
       <p:sp>
         <p:nvSpPr>
@@ -18694,6 +19322,10 @@
             </a:solidFill>
           </a:ln>
         </p:spPr>
+        <p:txBody>
+          <a:bodyPr/>
+          <a:p/>
+        </p:txBody>
       </p:sp>
       <p:sp>
         <p:nvSpPr>
@@ -18726,6 +19358,10 @@
             </a:solidFill>
           </a:ln>
         </p:spPr>
+        <p:txBody>
+          <a:bodyPr/>
+          <a:p/>
+        </p:txBody>
       </p:sp>
       <p:sp>
         <p:nvSpPr>
@@ -18760,6 +19396,10 @@
             </a:solidFill>
           </a:ln>
         </p:spPr>
+        <p:txBody>
+          <a:bodyPr/>
+          <a:p/>
+        </p:txBody>
       </p:sp>
       <p:sp>
         <p:nvSpPr>
@@ -18847,6 +19487,10 @@
             </a:solidFill>
           </a:ln>
         </p:spPr>
+        <p:txBody>
+          <a:bodyPr/>
+          <a:p/>
+        </p:txBody>
       </p:sp>
       <p:sp>
         <p:nvSpPr>
@@ -18879,6 +19523,10 @@
             </a:solidFill>
           </a:ln>
         </p:spPr>
+        <p:txBody>
+          <a:bodyPr/>
+          <a:p/>
+        </p:txBody>
       </p:sp>
       <p:sp>
         <p:nvSpPr>
@@ -18913,6 +19561,10 @@
             </a:solidFill>
           </a:ln>
         </p:spPr>
+        <p:txBody>
+          <a:bodyPr/>
+          <a:p/>
+        </p:txBody>
       </p:sp>
       <p:sp>
         <p:nvSpPr>
@@ -19000,6 +19652,10 @@
             </a:solidFill>
           </a:ln>
         </p:spPr>
+        <p:txBody>
+          <a:bodyPr/>
+          <a:p/>
+        </p:txBody>
       </p:sp>
       <p:sp>
         <p:nvSpPr>
@@ -19032,6 +19688,10 @@
             </a:solidFill>
           </a:ln>
         </p:spPr>
+        <p:txBody>
+          <a:bodyPr/>
+          <a:p/>
+        </p:txBody>
       </p:sp>
       <p:sp>
         <p:nvSpPr>
@@ -19066,6 +19726,10 @@
             </a:solidFill>
           </a:ln>
         </p:spPr>
+        <p:txBody>
+          <a:bodyPr/>
+          <a:p/>
+        </p:txBody>
       </p:sp>
       <p:sp>
         <p:nvSpPr>
@@ -19153,6 +19817,10 @@
             </a:solidFill>
           </a:ln>
         </p:spPr>
+        <p:txBody>
+          <a:bodyPr/>
+          <a:p/>
+        </p:txBody>
       </p:sp>
       <p:sp>
         <p:nvSpPr>
@@ -19185,6 +19853,10 @@
             </a:solidFill>
           </a:ln>
         </p:spPr>
+        <p:txBody>
+          <a:bodyPr/>
+          <a:p/>
+        </p:txBody>
       </p:sp>
       <p:sp>
         <p:nvSpPr>
@@ -19219,6 +19891,10 @@
             </a:solidFill>
           </a:ln>
         </p:spPr>
+        <p:txBody>
+          <a:bodyPr/>
+          <a:p/>
+        </p:txBody>
       </p:sp>
       <p:sp>
         <p:nvSpPr>
@@ -19310,6 +19986,10 @@
             </a:solidFill>
           </a:ln>
         </p:spPr>
+        <p:txBody>
+          <a:bodyPr/>
+          <a:p/>
+        </p:txBody>
       </p:sp>
       <p:sp>
         <p:nvSpPr>
@@ -19340,6 +20020,10 @@
             <a:noFill/>
           </a:ln>
         </p:spPr>
+        <p:txBody>
+          <a:bodyPr/>
+          <a:p/>
+        </p:txBody>
       </p:sp>
       <p:sp>
         <p:nvSpPr>
@@ -19488,6 +20172,10 @@
             </a:solidFill>
           </a:ln>
         </p:spPr>
+        <p:txBody>
+          <a:bodyPr/>
+          <a:p/>
+        </p:txBody>
       </p:sp>
       <p:sp>
         <p:nvSpPr>
@@ -19518,6 +20206,10 @@
             <a:noFill/>
           </a:ln>
         </p:spPr>
+        <p:txBody>
+          <a:bodyPr/>
+          <a:p/>
+        </p:txBody>
       </p:sp>
       <p:sp>
         <p:nvSpPr>
@@ -19666,6 +20358,10 @@
             </a:solidFill>
           </a:ln>
         </p:spPr>
+        <p:txBody>
+          <a:bodyPr/>
+          <a:p/>
+        </p:txBody>
       </p:sp>
       <p:sp>
         <p:nvSpPr>
@@ -19696,6 +20392,10 @@
             <a:noFill/>
           </a:ln>
         </p:spPr>
+        <p:txBody>
+          <a:bodyPr/>
+          <a:p/>
+        </p:txBody>
       </p:sp>
       <p:sp>
         <p:nvSpPr>
@@ -19844,6 +20544,10 @@
             </a:solidFill>
           </a:ln>
         </p:spPr>
+        <p:txBody>
+          <a:bodyPr/>
+          <a:p/>
+        </p:txBody>
       </p:sp>
       <p:sp>
         <p:nvSpPr>
@@ -19874,6 +20578,10 @@
             <a:noFill/>
           </a:ln>
         </p:spPr>
+        <p:txBody>
+          <a:bodyPr/>
+          <a:p/>
+        </p:txBody>
       </p:sp>
       <p:sp>
         <p:nvSpPr>
@@ -20022,6 +20730,10 @@
             </a:solidFill>
           </a:ln>
         </p:spPr>
+        <p:txBody>
+          <a:bodyPr/>
+          <a:p/>
+        </p:txBody>
       </p:sp>
       <p:sp>
         <p:nvSpPr>
@@ -20052,6 +20764,10 @@
             <a:noFill/>
           </a:ln>
         </p:spPr>
+        <p:txBody>
+          <a:bodyPr/>
+          <a:p/>
+        </p:txBody>
       </p:sp>
       <p:sp>
         <p:nvSpPr>
@@ -20200,6 +20916,10 @@
             </a:solidFill>
           </a:ln>
         </p:spPr>
+        <p:txBody>
+          <a:bodyPr/>
+          <a:p/>
+        </p:txBody>
       </p:sp>
       <p:sp>
         <p:nvSpPr>
@@ -20230,6 +20950,10 @@
             <a:noFill/>
           </a:ln>
         </p:spPr>
+        <p:txBody>
+          <a:bodyPr/>
+          <a:p/>
+        </p:txBody>
       </p:sp>
       <p:sp>
         <p:nvSpPr>
@@ -20378,6 +21102,10 @@
             </a:solidFill>
           </a:ln>
         </p:spPr>
+        <p:txBody>
+          <a:bodyPr/>
+          <a:p/>
+        </p:txBody>
       </p:sp>
       <p:sp>
         <p:nvSpPr>
@@ -20408,6 +21136,10 @@
             <a:noFill/>
           </a:ln>
         </p:spPr>
+        <p:txBody>
+          <a:bodyPr/>
+          <a:p/>
+        </p:txBody>
       </p:sp>
       <p:sp>
         <p:nvSpPr>
@@ -20556,6 +21288,10 @@
             </a:solidFill>
           </a:ln>
         </p:spPr>
+        <p:txBody>
+          <a:bodyPr/>
+          <a:p/>
+        </p:txBody>
       </p:sp>
       <p:sp>
         <p:nvSpPr>
@@ -20586,6 +21322,10 @@
             <a:noFill/>
           </a:ln>
         </p:spPr>
+        <p:txBody>
+          <a:bodyPr/>
+          <a:p/>
+        </p:txBody>
       </p:sp>
       <p:sp>
         <p:nvSpPr>
@@ -20825,6 +21565,10 @@
             <a:noFill/>
           </a:ln>
         </p:spPr>
+        <p:txBody>
+          <a:bodyPr/>
+          <a:p/>
+        </p:txBody>
       </p:sp>
       <p:sp>
         <p:nvSpPr>
@@ -21026,6 +21770,10 @@
             </a:solidFill>
           </a:ln>
         </p:spPr>
+        <p:txBody>
+          <a:bodyPr/>
+          <a:p/>
+        </p:txBody>
       </p:sp>
       <p:sp>
         <p:nvSpPr>
@@ -21174,6 +21922,10 @@
             </a:solidFill>
           </a:ln>
         </p:spPr>
+        <p:txBody>
+          <a:bodyPr/>
+          <a:p/>
+        </p:txBody>
       </p:sp>
       <p:sp>
         <p:nvSpPr>
@@ -21318,6 +22070,10 @@
             </a:solidFill>
           </a:ln>
         </p:spPr>
+        <p:txBody>
+          <a:bodyPr/>
+          <a:p/>
+        </p:txBody>
       </p:sp>
       <p:sp>
         <p:nvSpPr>
@@ -21409,6 +22165,10 @@
             </a:solidFill>
           </a:ln>
         </p:spPr>
+        <p:txBody>
+          <a:bodyPr/>
+          <a:p/>
+        </p:txBody>
       </p:sp>
       <p:sp>
         <p:nvSpPr>
@@ -21553,6 +22313,10 @@
             </a:solidFill>
           </a:ln>
         </p:spPr>
+        <p:txBody>
+          <a:bodyPr/>
+          <a:p/>
+        </p:txBody>
       </p:sp>
       <p:sp>
         <p:nvSpPr>
@@ -21644,6 +22408,10 @@
             </a:solidFill>
           </a:ln>
         </p:spPr>
+        <p:txBody>
+          <a:bodyPr/>
+          <a:p/>
+        </p:txBody>
       </p:sp>
       <p:sp>
         <p:nvSpPr>
@@ -21788,6 +22556,10 @@
             </a:solidFill>
           </a:ln>
         </p:spPr>
+        <p:txBody>
+          <a:bodyPr/>
+          <a:p/>
+        </p:txBody>
       </p:sp>
       <p:sp>
         <p:nvSpPr>
@@ -21879,6 +22651,10 @@
             </a:solidFill>
           </a:ln>
         </p:spPr>
+        <p:txBody>
+          <a:bodyPr/>
+          <a:p/>
+        </p:txBody>
       </p:sp>
       <p:sp>
         <p:nvSpPr>
@@ -22023,6 +22799,10 @@
             </a:solidFill>
           </a:ln>
         </p:spPr>
+        <p:txBody>
+          <a:bodyPr/>
+          <a:p/>
+        </p:txBody>
       </p:sp>
       <p:sp>
         <p:nvSpPr>
@@ -22114,6 +22894,10 @@
             </a:solidFill>
           </a:ln>
         </p:spPr>
+        <p:txBody>
+          <a:bodyPr/>
+          <a:p/>
+        </p:txBody>
       </p:sp>
       <p:sp>
         <p:nvSpPr>
@@ -22258,6 +23042,10 @@
             </a:solidFill>
           </a:ln>
         </p:spPr>
+        <p:txBody>
+          <a:bodyPr/>
+          <a:p/>
+        </p:txBody>
       </p:sp>
       <p:sp>
         <p:nvSpPr>
@@ -22349,6 +23137,10 @@
             </a:solidFill>
           </a:ln>
         </p:spPr>
+        <p:txBody>
+          <a:bodyPr/>
+          <a:p/>
+        </p:txBody>
       </p:sp>
       <p:sp>
         <p:nvSpPr>
@@ -22493,6 +23285,10 @@
             </a:solidFill>
           </a:ln>
         </p:spPr>
+        <p:txBody>
+          <a:bodyPr/>
+          <a:p/>
+        </p:txBody>
       </p:sp>
       <p:sp>
         <p:nvSpPr>
@@ -22584,6 +23380,10 @@
             </a:solidFill>
           </a:ln>
         </p:spPr>
+        <p:txBody>
+          <a:bodyPr/>
+          <a:p/>
+        </p:txBody>
       </p:sp>
       <p:sp>
         <p:nvSpPr>
@@ -22728,6 +23528,10 @@
             </a:solidFill>
           </a:ln>
         </p:spPr>
+        <p:txBody>
+          <a:bodyPr/>
+          <a:p/>
+        </p:txBody>
       </p:sp>
       <p:sp>
         <p:nvSpPr>
